--- a/Platform Autopilot.pptx
+++ b/Platform Autopilot.pptx
@@ -3338,7 +3338,7 @@
         <p:spPr>
           <a:xfrm>
             <a:off x="2788920" y="1444752"/>
-            <a:ext cx="1508760" cy="182880"/>
+            <a:ext cx="1508760" cy="207749"/>
           </a:xfrm>
           <a:prstGeom prst="rect">
             <a:avLst/>
@@ -3353,13 +3353,40 @@
           <a:p>
             <a:pPr algn="ctr"/>
             <a:r>
-              <a:rPr sz="750" b="0">
+              <a:rPr lang="en-US" sz="750" dirty="0">
                 <a:solidFill>
                   <a:srgbClr val="CBD5E1"/>
                 </a:solidFill>
                 <a:latin typeface="Aptos"/>
               </a:rPr>
-              <a:t>continuous detection</a:t>
+              <a:t>C</a:t>
+            </a:r>
+            <a:r>
+              <a:rPr sz="750" b="0" dirty="0">
+                <a:solidFill>
+                  <a:srgbClr val="CBD5E1"/>
+                </a:solidFill>
+                <a:latin typeface="Aptos"/>
+              </a:rPr>
+              <a:t>ontinuous </a:t>
+            </a:r>
+            <a:r>
+              <a:rPr lang="en-US" sz="750" dirty="0">
+                <a:solidFill>
+                  <a:srgbClr val="CBD5E1"/>
+                </a:solidFill>
+                <a:latin typeface="Aptos"/>
+              </a:rPr>
+              <a:t>D</a:t>
+            </a:r>
+            <a:r>
+              <a:rPr sz="750" b="0" dirty="0">
+                <a:solidFill>
+                  <a:srgbClr val="CBD5E1"/>
+                </a:solidFill>
+                <a:latin typeface="Aptos"/>
+              </a:rPr>
+              <a:t>etection</a:t>
             </a:r>
           </a:p>
         </p:txBody>
@@ -3408,7 +3435,7 @@
         <p:spPr>
           <a:xfrm>
             <a:off x="4983480" y="1444752"/>
-            <a:ext cx="1508760" cy="182880"/>
+            <a:ext cx="1508760" cy="207749"/>
           </a:xfrm>
           <a:prstGeom prst="rect">
             <a:avLst/>
@@ -3423,153 +3450,58 @@
           <a:p>
             <a:pPr algn="ctr"/>
             <a:r>
-              <a:rPr sz="750" b="0">
+              <a:rPr lang="en-US" sz="750" dirty="0">
                 <a:solidFill>
                   <a:srgbClr val="CBD5E1"/>
                 </a:solidFill>
                 <a:latin typeface="Aptos"/>
               </a:rPr>
-              <a:t>correlated operational view</a:t>
-            </a:r>
-          </a:p>
-        </p:txBody>
-      </p:sp>
-      <p:sp>
-        <p:nvSpPr>
-          <p:cNvPr id="11" name="TextBox 10"/>
-          <p:cNvSpPr txBox="1"/>
-          <p:nvPr/>
-        </p:nvSpPr>
-        <p:spPr>
-          <a:xfrm>
-            <a:off x="6995160" y="1197864"/>
-            <a:ext cx="1508760" cy="256032"/>
-          </a:xfrm>
-          <a:prstGeom prst="rect">
-            <a:avLst/>
-          </a:prstGeom>
-          <a:noFill/>
-        </p:spPr>
-        <p:txBody>
-          <a:bodyPr wrap="square">
-            <a:spAutoFit/>
-          </a:bodyPr>
-          <a:lstStyle/>
-          <a:p>
-            <a:pPr algn="ctr"/>
-            <a:r>
-              <a:rPr sz="1500" b="1">
-                <a:solidFill>
-                  <a:srgbClr val="FFFFFF"/>
+              <a:t>C</a:t>
+            </a:r>
+            <a:r>
+              <a:rPr sz="750" b="0" dirty="0">
+                <a:solidFill>
+                  <a:srgbClr val="CBD5E1"/>
                 </a:solidFill>
                 <a:latin typeface="Aptos"/>
               </a:rPr>
-              <a:t>40–60%</a:t>
-            </a:r>
-          </a:p>
-        </p:txBody>
-      </p:sp>
-      <p:sp>
-        <p:nvSpPr>
-          <p:cNvPr id="12" name="TextBox 11"/>
-          <p:cNvSpPr txBox="1"/>
-          <p:nvPr/>
-        </p:nvSpPr>
-        <p:spPr>
-          <a:xfrm>
-            <a:off x="6995160" y="1444752"/>
-            <a:ext cx="1508760" cy="182880"/>
-          </a:xfrm>
-          <a:prstGeom prst="rect">
-            <a:avLst/>
-          </a:prstGeom>
-          <a:noFill/>
-        </p:spPr>
-        <p:txBody>
-          <a:bodyPr wrap="square">
-            <a:spAutoFit/>
-          </a:bodyPr>
-          <a:lstStyle/>
-          <a:p>
-            <a:pPr algn="ctr"/>
-            <a:r>
-              <a:rPr sz="750" b="0">
+              <a:t>orrelated </a:t>
+            </a:r>
+            <a:r>
+              <a:rPr lang="en-US" sz="750" dirty="0">
                 <a:solidFill>
                   <a:srgbClr val="CBD5E1"/>
                 </a:solidFill>
                 <a:latin typeface="Aptos"/>
               </a:rPr>
-              <a:t>target reduction in manual analysis*</a:t>
-            </a:r>
-          </a:p>
-        </p:txBody>
-      </p:sp>
-      <p:sp>
-        <p:nvSpPr>
-          <p:cNvPr id="13" name="TextBox 12"/>
-          <p:cNvSpPr txBox="1"/>
-          <p:nvPr/>
-        </p:nvSpPr>
-        <p:spPr>
-          <a:xfrm>
-            <a:off x="9372600" y="1197864"/>
-            <a:ext cx="1508760" cy="256032"/>
-          </a:xfrm>
-          <a:prstGeom prst="rect">
-            <a:avLst/>
-          </a:prstGeom>
-          <a:noFill/>
-        </p:spPr>
-        <p:txBody>
-          <a:bodyPr wrap="square">
-            <a:spAutoFit/>
-          </a:bodyPr>
-          <a:lstStyle/>
-          <a:p>
-            <a:pPr algn="ctr"/>
-            <a:r>
-              <a:rPr sz="1500" b="1">
-                <a:solidFill>
-                  <a:srgbClr val="FFFFFF"/>
+              <a:t>O</a:t>
+            </a:r>
+            <a:r>
+              <a:rPr sz="750" b="0" dirty="0">
+                <a:solidFill>
+                  <a:srgbClr val="CBD5E1"/>
                 </a:solidFill>
                 <a:latin typeface="Aptos"/>
               </a:rPr>
-              <a:t>20–30%</a:t>
-            </a:r>
-          </a:p>
-        </p:txBody>
-      </p:sp>
-      <p:sp>
-        <p:nvSpPr>
-          <p:cNvPr id="14" name="TextBox 13"/>
-          <p:cNvSpPr txBox="1"/>
-          <p:nvPr/>
-        </p:nvSpPr>
-        <p:spPr>
-          <a:xfrm>
-            <a:off x="9372600" y="1444752"/>
-            <a:ext cx="1508760" cy="182880"/>
-          </a:xfrm>
-          <a:prstGeom prst="rect">
-            <a:avLst/>
-          </a:prstGeom>
-          <a:noFill/>
-        </p:spPr>
-        <p:txBody>
-          <a:bodyPr wrap="square">
-            <a:spAutoFit/>
-          </a:bodyPr>
-          <a:lstStyle/>
-          <a:p>
-            <a:pPr algn="ctr"/>
-            <a:r>
-              <a:rPr sz="750" b="0">
+              <a:t>perational </a:t>
+            </a:r>
+            <a:r>
+              <a:rPr lang="en-US" sz="750" dirty="0">
                 <a:solidFill>
                   <a:srgbClr val="CBD5E1"/>
                 </a:solidFill>
                 <a:latin typeface="Aptos"/>
               </a:rPr>
-              <a:t>target faster resolution*</a:t>
+              <a:t>V</a:t>
+            </a:r>
+            <a:r>
+              <a:rPr sz="750" b="0" dirty="0">
+                <a:solidFill>
+                  <a:srgbClr val="CBD5E1"/>
+                </a:solidFill>
+                <a:latin typeface="Aptos"/>
+              </a:rPr>
+              <a:t>iew</a:t>
             </a:r>
           </a:p>
         </p:txBody>
@@ -5459,6 +5391,552 @@
                 <a:latin typeface="Aptos"/>
               </a:rPr>
               <a:t>*Indicative target metrics for business case validation; baseline should be established during pilot.</a:t>
+            </a:r>
+          </a:p>
+        </p:txBody>
+      </p:sp>
+      <p:sp>
+        <p:nvSpPr>
+          <p:cNvPr id="64" name="TextBox 71">
+            <a:extLst>
+              <a:ext uri="{FF2B5EF4-FFF2-40B4-BE49-F238E27FC236}">
+                <a16:creationId xmlns:a16="http://schemas.microsoft.com/office/drawing/2014/main" id="{B212A41D-7E49-9863-DB7B-4316C507B546}"/>
+              </a:ext>
+            </a:extLst>
+          </p:cNvPr>
+          <p:cNvSpPr txBox="1"/>
+          <p:nvPr/>
+        </p:nvSpPr>
+        <p:spPr>
+          <a:xfrm>
+            <a:off x="7747914" y="1106135"/>
+            <a:ext cx="369012" cy="461665"/>
+          </a:xfrm>
+          <a:prstGeom prst="rect">
+            <a:avLst/>
+          </a:prstGeom>
+          <a:noFill/>
+        </p:spPr>
+        <p:txBody>
+          <a:bodyPr wrap="none">
+            <a:spAutoFit/>
+          </a:bodyPr>
+          <a:lstStyle>
+            <a:defPPr>
+              <a:defRPr lang="en-US"/>
+            </a:defPPr>
+            <a:lvl1pPr marL="0" algn="l" defTabSz="457200" rtl="0" eaLnBrk="1" latinLnBrk="0" hangingPunct="1">
+              <a:defRPr sz="1800" kern="1200">
+                <a:solidFill>
+                  <a:schemeClr val="tx1"/>
+                </a:solidFill>
+                <a:latin typeface="+mn-lt"/>
+                <a:ea typeface="+mn-ea"/>
+                <a:cs typeface="+mn-cs"/>
+              </a:defRPr>
+            </a:lvl1pPr>
+            <a:lvl2pPr marL="457200" algn="l" defTabSz="457200" rtl="0" eaLnBrk="1" latinLnBrk="0" hangingPunct="1">
+              <a:defRPr sz="1800" kern="1200">
+                <a:solidFill>
+                  <a:schemeClr val="tx1"/>
+                </a:solidFill>
+                <a:latin typeface="+mn-lt"/>
+                <a:ea typeface="+mn-ea"/>
+                <a:cs typeface="+mn-cs"/>
+              </a:defRPr>
+            </a:lvl2pPr>
+            <a:lvl3pPr marL="914400" algn="l" defTabSz="457200" rtl="0" eaLnBrk="1" latinLnBrk="0" hangingPunct="1">
+              <a:defRPr sz="1800" kern="1200">
+                <a:solidFill>
+                  <a:schemeClr val="tx1"/>
+                </a:solidFill>
+                <a:latin typeface="+mn-lt"/>
+                <a:ea typeface="+mn-ea"/>
+                <a:cs typeface="+mn-cs"/>
+              </a:defRPr>
+            </a:lvl3pPr>
+            <a:lvl4pPr marL="1371600" algn="l" defTabSz="457200" rtl="0" eaLnBrk="1" latinLnBrk="0" hangingPunct="1">
+              <a:defRPr sz="1800" kern="1200">
+                <a:solidFill>
+                  <a:schemeClr val="tx1"/>
+                </a:solidFill>
+                <a:latin typeface="+mn-lt"/>
+                <a:ea typeface="+mn-ea"/>
+                <a:cs typeface="+mn-cs"/>
+              </a:defRPr>
+            </a:lvl4pPr>
+            <a:lvl5pPr marL="1828800" algn="l" defTabSz="457200" rtl="0" eaLnBrk="1" latinLnBrk="0" hangingPunct="1">
+              <a:defRPr sz="1800" kern="1200">
+                <a:solidFill>
+                  <a:schemeClr val="tx1"/>
+                </a:solidFill>
+                <a:latin typeface="+mn-lt"/>
+                <a:ea typeface="+mn-ea"/>
+                <a:cs typeface="+mn-cs"/>
+              </a:defRPr>
+            </a:lvl5pPr>
+            <a:lvl6pPr marL="2286000" algn="l" defTabSz="457200" rtl="0" eaLnBrk="1" latinLnBrk="0" hangingPunct="1">
+              <a:defRPr sz="1800" kern="1200">
+                <a:solidFill>
+                  <a:schemeClr val="tx1"/>
+                </a:solidFill>
+                <a:latin typeface="+mn-lt"/>
+                <a:ea typeface="+mn-ea"/>
+                <a:cs typeface="+mn-cs"/>
+              </a:defRPr>
+            </a:lvl6pPr>
+            <a:lvl7pPr marL="2743200" algn="l" defTabSz="457200" rtl="0" eaLnBrk="1" latinLnBrk="0" hangingPunct="1">
+              <a:defRPr sz="1800" kern="1200">
+                <a:solidFill>
+                  <a:schemeClr val="tx1"/>
+                </a:solidFill>
+                <a:latin typeface="+mn-lt"/>
+                <a:ea typeface="+mn-ea"/>
+                <a:cs typeface="+mn-cs"/>
+              </a:defRPr>
+            </a:lvl7pPr>
+            <a:lvl8pPr marL="3200400" algn="l" defTabSz="457200" rtl="0" eaLnBrk="1" latinLnBrk="0" hangingPunct="1">
+              <a:defRPr sz="1800" kern="1200">
+                <a:solidFill>
+                  <a:schemeClr val="tx1"/>
+                </a:solidFill>
+                <a:latin typeface="+mn-lt"/>
+                <a:ea typeface="+mn-ea"/>
+                <a:cs typeface="+mn-cs"/>
+              </a:defRPr>
+            </a:lvl8pPr>
+            <a:lvl9pPr marL="3657600" algn="l" defTabSz="457200" rtl="0" eaLnBrk="1" latinLnBrk="0" hangingPunct="1">
+              <a:defRPr sz="1800" kern="1200">
+                <a:solidFill>
+                  <a:schemeClr val="tx1"/>
+                </a:solidFill>
+                <a:latin typeface="+mn-lt"/>
+                <a:ea typeface="+mn-ea"/>
+                <a:cs typeface="+mn-cs"/>
+              </a:defRPr>
+            </a:lvl9pPr>
+          </a:lstStyle>
+          <a:p>
+            <a:pPr algn="ctr"/>
+            <a:r>
+              <a:rPr sz="2400" b="1" dirty="0">
+                <a:solidFill>
+                  <a:srgbClr val="FFFFFF"/>
+                </a:solidFill>
+                <a:latin typeface="Aptos"/>
+              </a:rPr>
+              <a:t>↓</a:t>
+            </a:r>
+          </a:p>
+        </p:txBody>
+      </p:sp>
+      <p:sp>
+        <p:nvSpPr>
+          <p:cNvPr id="65" name="TextBox 72">
+            <a:extLst>
+              <a:ext uri="{FF2B5EF4-FFF2-40B4-BE49-F238E27FC236}">
+                <a16:creationId xmlns:a16="http://schemas.microsoft.com/office/drawing/2014/main" id="{97FF0446-A0F2-3422-A93D-692917668E6C}"/>
+              </a:ext>
+            </a:extLst>
+          </p:cNvPr>
+          <p:cNvSpPr txBox="1"/>
+          <p:nvPr/>
+        </p:nvSpPr>
+        <p:spPr>
+          <a:xfrm>
+            <a:off x="7173956" y="1449913"/>
+            <a:ext cx="1600200" cy="219456"/>
+          </a:xfrm>
+          <a:prstGeom prst="rect">
+            <a:avLst/>
+          </a:prstGeom>
+          <a:noFill/>
+        </p:spPr>
+        <p:txBody>
+          <a:bodyPr wrap="none">
+            <a:spAutoFit/>
+          </a:bodyPr>
+          <a:lstStyle>
+            <a:defPPr>
+              <a:defRPr lang="en-US"/>
+            </a:defPPr>
+            <a:lvl1pPr marL="0" algn="l" defTabSz="457200" rtl="0" eaLnBrk="1" latinLnBrk="0" hangingPunct="1">
+              <a:defRPr sz="1800" kern="1200">
+                <a:solidFill>
+                  <a:schemeClr val="tx1"/>
+                </a:solidFill>
+                <a:latin typeface="+mn-lt"/>
+                <a:ea typeface="+mn-ea"/>
+                <a:cs typeface="+mn-cs"/>
+              </a:defRPr>
+            </a:lvl1pPr>
+            <a:lvl2pPr marL="457200" algn="l" defTabSz="457200" rtl="0" eaLnBrk="1" latinLnBrk="0" hangingPunct="1">
+              <a:defRPr sz="1800" kern="1200">
+                <a:solidFill>
+                  <a:schemeClr val="tx1"/>
+                </a:solidFill>
+                <a:latin typeface="+mn-lt"/>
+                <a:ea typeface="+mn-ea"/>
+                <a:cs typeface="+mn-cs"/>
+              </a:defRPr>
+            </a:lvl2pPr>
+            <a:lvl3pPr marL="914400" algn="l" defTabSz="457200" rtl="0" eaLnBrk="1" latinLnBrk="0" hangingPunct="1">
+              <a:defRPr sz="1800" kern="1200">
+                <a:solidFill>
+                  <a:schemeClr val="tx1"/>
+                </a:solidFill>
+                <a:latin typeface="+mn-lt"/>
+                <a:ea typeface="+mn-ea"/>
+                <a:cs typeface="+mn-cs"/>
+              </a:defRPr>
+            </a:lvl3pPr>
+            <a:lvl4pPr marL="1371600" algn="l" defTabSz="457200" rtl="0" eaLnBrk="1" latinLnBrk="0" hangingPunct="1">
+              <a:defRPr sz="1800" kern="1200">
+                <a:solidFill>
+                  <a:schemeClr val="tx1"/>
+                </a:solidFill>
+                <a:latin typeface="+mn-lt"/>
+                <a:ea typeface="+mn-ea"/>
+                <a:cs typeface="+mn-cs"/>
+              </a:defRPr>
+            </a:lvl4pPr>
+            <a:lvl5pPr marL="1828800" algn="l" defTabSz="457200" rtl="0" eaLnBrk="1" latinLnBrk="0" hangingPunct="1">
+              <a:defRPr sz="1800" kern="1200">
+                <a:solidFill>
+                  <a:schemeClr val="tx1"/>
+                </a:solidFill>
+                <a:latin typeface="+mn-lt"/>
+                <a:ea typeface="+mn-ea"/>
+                <a:cs typeface="+mn-cs"/>
+              </a:defRPr>
+            </a:lvl5pPr>
+            <a:lvl6pPr marL="2286000" algn="l" defTabSz="457200" rtl="0" eaLnBrk="1" latinLnBrk="0" hangingPunct="1">
+              <a:defRPr sz="1800" kern="1200">
+                <a:solidFill>
+                  <a:schemeClr val="tx1"/>
+                </a:solidFill>
+                <a:latin typeface="+mn-lt"/>
+                <a:ea typeface="+mn-ea"/>
+                <a:cs typeface="+mn-cs"/>
+              </a:defRPr>
+            </a:lvl6pPr>
+            <a:lvl7pPr marL="2743200" algn="l" defTabSz="457200" rtl="0" eaLnBrk="1" latinLnBrk="0" hangingPunct="1">
+              <a:defRPr sz="1800" kern="1200">
+                <a:solidFill>
+                  <a:schemeClr val="tx1"/>
+                </a:solidFill>
+                <a:latin typeface="+mn-lt"/>
+                <a:ea typeface="+mn-ea"/>
+                <a:cs typeface="+mn-cs"/>
+              </a:defRPr>
+            </a:lvl7pPr>
+            <a:lvl8pPr marL="3200400" algn="l" defTabSz="457200" rtl="0" eaLnBrk="1" latinLnBrk="0" hangingPunct="1">
+              <a:defRPr sz="1800" kern="1200">
+                <a:solidFill>
+                  <a:schemeClr val="tx1"/>
+                </a:solidFill>
+                <a:latin typeface="+mn-lt"/>
+                <a:ea typeface="+mn-ea"/>
+                <a:cs typeface="+mn-cs"/>
+              </a:defRPr>
+            </a:lvl8pPr>
+            <a:lvl9pPr marL="3657600" algn="l" defTabSz="457200" rtl="0" eaLnBrk="1" latinLnBrk="0" hangingPunct="1">
+              <a:defRPr sz="1800" kern="1200">
+                <a:solidFill>
+                  <a:schemeClr val="tx1"/>
+                </a:solidFill>
+                <a:latin typeface="+mn-lt"/>
+                <a:ea typeface="+mn-ea"/>
+                <a:cs typeface="+mn-cs"/>
+              </a:defRPr>
+            </a:lvl9pPr>
+          </a:lstStyle>
+          <a:p>
+            <a:pPr algn="ctr"/>
+            <a:r>
+              <a:rPr sz="750" dirty="0">
+                <a:solidFill>
+                  <a:srgbClr val="CBD5E1"/>
+                </a:solidFill>
+                <a:latin typeface="Aptos"/>
+              </a:rPr>
+              <a:t>Manual Effort</a:t>
+            </a:r>
+          </a:p>
+        </p:txBody>
+      </p:sp>
+      <p:sp>
+        <p:nvSpPr>
+          <p:cNvPr id="66" name="TextBox 72">
+            <a:extLst>
+              <a:ext uri="{FF2B5EF4-FFF2-40B4-BE49-F238E27FC236}">
+                <a16:creationId xmlns:a16="http://schemas.microsoft.com/office/drawing/2014/main" id="{44D4DFCB-D37C-7C59-0C34-B4749D1748F3}"/>
+              </a:ext>
+            </a:extLst>
+          </p:cNvPr>
+          <p:cNvSpPr txBox="1"/>
+          <p:nvPr/>
+        </p:nvSpPr>
+        <p:spPr>
+          <a:xfrm>
+            <a:off x="9295386" y="1454792"/>
+            <a:ext cx="1212191" cy="207749"/>
+          </a:xfrm>
+          <a:prstGeom prst="rect">
+            <a:avLst/>
+          </a:prstGeom>
+          <a:noFill/>
+        </p:spPr>
+        <p:txBody>
+          <a:bodyPr wrap="none">
+            <a:spAutoFit/>
+          </a:bodyPr>
+          <a:lstStyle>
+            <a:defPPr>
+              <a:defRPr lang="en-US"/>
+            </a:defPPr>
+            <a:lvl1pPr marL="0" algn="l" defTabSz="457200" rtl="0" eaLnBrk="1" latinLnBrk="0" hangingPunct="1">
+              <a:defRPr sz="1800" kern="1200">
+                <a:solidFill>
+                  <a:schemeClr val="tx1"/>
+                </a:solidFill>
+                <a:latin typeface="+mn-lt"/>
+                <a:ea typeface="+mn-ea"/>
+                <a:cs typeface="+mn-cs"/>
+              </a:defRPr>
+            </a:lvl1pPr>
+            <a:lvl2pPr marL="457200" algn="l" defTabSz="457200" rtl="0" eaLnBrk="1" latinLnBrk="0" hangingPunct="1">
+              <a:defRPr sz="1800" kern="1200">
+                <a:solidFill>
+                  <a:schemeClr val="tx1"/>
+                </a:solidFill>
+                <a:latin typeface="+mn-lt"/>
+                <a:ea typeface="+mn-ea"/>
+                <a:cs typeface="+mn-cs"/>
+              </a:defRPr>
+            </a:lvl2pPr>
+            <a:lvl3pPr marL="914400" algn="l" defTabSz="457200" rtl="0" eaLnBrk="1" latinLnBrk="0" hangingPunct="1">
+              <a:defRPr sz="1800" kern="1200">
+                <a:solidFill>
+                  <a:schemeClr val="tx1"/>
+                </a:solidFill>
+                <a:latin typeface="+mn-lt"/>
+                <a:ea typeface="+mn-ea"/>
+                <a:cs typeface="+mn-cs"/>
+              </a:defRPr>
+            </a:lvl3pPr>
+            <a:lvl4pPr marL="1371600" algn="l" defTabSz="457200" rtl="0" eaLnBrk="1" latinLnBrk="0" hangingPunct="1">
+              <a:defRPr sz="1800" kern="1200">
+                <a:solidFill>
+                  <a:schemeClr val="tx1"/>
+                </a:solidFill>
+                <a:latin typeface="+mn-lt"/>
+                <a:ea typeface="+mn-ea"/>
+                <a:cs typeface="+mn-cs"/>
+              </a:defRPr>
+            </a:lvl4pPr>
+            <a:lvl5pPr marL="1828800" algn="l" defTabSz="457200" rtl="0" eaLnBrk="1" latinLnBrk="0" hangingPunct="1">
+              <a:defRPr sz="1800" kern="1200">
+                <a:solidFill>
+                  <a:schemeClr val="tx1"/>
+                </a:solidFill>
+                <a:latin typeface="+mn-lt"/>
+                <a:ea typeface="+mn-ea"/>
+                <a:cs typeface="+mn-cs"/>
+              </a:defRPr>
+            </a:lvl5pPr>
+            <a:lvl6pPr marL="2286000" algn="l" defTabSz="457200" rtl="0" eaLnBrk="1" latinLnBrk="0" hangingPunct="1">
+              <a:defRPr sz="1800" kern="1200">
+                <a:solidFill>
+                  <a:schemeClr val="tx1"/>
+                </a:solidFill>
+                <a:latin typeface="+mn-lt"/>
+                <a:ea typeface="+mn-ea"/>
+                <a:cs typeface="+mn-cs"/>
+              </a:defRPr>
+            </a:lvl6pPr>
+            <a:lvl7pPr marL="2743200" algn="l" defTabSz="457200" rtl="0" eaLnBrk="1" latinLnBrk="0" hangingPunct="1">
+              <a:defRPr sz="1800" kern="1200">
+                <a:solidFill>
+                  <a:schemeClr val="tx1"/>
+                </a:solidFill>
+                <a:latin typeface="+mn-lt"/>
+                <a:ea typeface="+mn-ea"/>
+                <a:cs typeface="+mn-cs"/>
+              </a:defRPr>
+            </a:lvl7pPr>
+            <a:lvl8pPr marL="3200400" algn="l" defTabSz="457200" rtl="0" eaLnBrk="1" latinLnBrk="0" hangingPunct="1">
+              <a:defRPr sz="1800" kern="1200">
+                <a:solidFill>
+                  <a:schemeClr val="tx1"/>
+                </a:solidFill>
+                <a:latin typeface="+mn-lt"/>
+                <a:ea typeface="+mn-ea"/>
+                <a:cs typeface="+mn-cs"/>
+              </a:defRPr>
+            </a:lvl8pPr>
+            <a:lvl9pPr marL="3657600" algn="l" defTabSz="457200" rtl="0" eaLnBrk="1" latinLnBrk="0" hangingPunct="1">
+              <a:defRPr sz="1800" kern="1200">
+                <a:solidFill>
+                  <a:schemeClr val="tx1"/>
+                </a:solidFill>
+                <a:latin typeface="+mn-lt"/>
+                <a:ea typeface="+mn-ea"/>
+                <a:cs typeface="+mn-cs"/>
+              </a:defRPr>
+            </a:lvl9pPr>
+          </a:lstStyle>
+          <a:p>
+            <a:pPr algn="ctr"/>
+            <a:r>
+              <a:rPr lang="en-US" sz="750" dirty="0">
+                <a:solidFill>
+                  <a:srgbClr val="CBD5E1"/>
+                </a:solidFill>
+                <a:latin typeface="Aptos"/>
+              </a:rPr>
+              <a:t>Incident Resolution Time</a:t>
+            </a:r>
+            <a:endParaRPr sz="750" dirty="0">
+              <a:solidFill>
+                <a:srgbClr val="CBD5E1"/>
+              </a:solidFill>
+              <a:latin typeface="Aptos"/>
+            </a:endParaRPr>
+          </a:p>
+        </p:txBody>
+      </p:sp>
+      <p:sp>
+        <p:nvSpPr>
+          <p:cNvPr id="67" name="TextBox 71">
+            <a:extLst>
+              <a:ext uri="{FF2B5EF4-FFF2-40B4-BE49-F238E27FC236}">
+                <a16:creationId xmlns:a16="http://schemas.microsoft.com/office/drawing/2014/main" id="{21BA9405-2AE1-B5F6-5088-43FA70055BF2}"/>
+              </a:ext>
+            </a:extLst>
+          </p:cNvPr>
+          <p:cNvSpPr txBox="1"/>
+          <p:nvPr/>
+        </p:nvSpPr>
+        <p:spPr>
+          <a:xfrm>
+            <a:off x="9757968" y="1090583"/>
+            <a:ext cx="369012" cy="461665"/>
+          </a:xfrm>
+          <a:prstGeom prst="rect">
+            <a:avLst/>
+          </a:prstGeom>
+          <a:noFill/>
+        </p:spPr>
+        <p:txBody>
+          <a:bodyPr wrap="none">
+            <a:spAutoFit/>
+          </a:bodyPr>
+          <a:lstStyle>
+            <a:defPPr>
+              <a:defRPr lang="en-US"/>
+            </a:defPPr>
+            <a:lvl1pPr marL="0" algn="l" defTabSz="457200" rtl="0" eaLnBrk="1" latinLnBrk="0" hangingPunct="1">
+              <a:defRPr sz="1800" kern="1200">
+                <a:solidFill>
+                  <a:schemeClr val="tx1"/>
+                </a:solidFill>
+                <a:latin typeface="+mn-lt"/>
+                <a:ea typeface="+mn-ea"/>
+                <a:cs typeface="+mn-cs"/>
+              </a:defRPr>
+            </a:lvl1pPr>
+            <a:lvl2pPr marL="457200" algn="l" defTabSz="457200" rtl="0" eaLnBrk="1" latinLnBrk="0" hangingPunct="1">
+              <a:defRPr sz="1800" kern="1200">
+                <a:solidFill>
+                  <a:schemeClr val="tx1"/>
+                </a:solidFill>
+                <a:latin typeface="+mn-lt"/>
+                <a:ea typeface="+mn-ea"/>
+                <a:cs typeface="+mn-cs"/>
+              </a:defRPr>
+            </a:lvl2pPr>
+            <a:lvl3pPr marL="914400" algn="l" defTabSz="457200" rtl="0" eaLnBrk="1" latinLnBrk="0" hangingPunct="1">
+              <a:defRPr sz="1800" kern="1200">
+                <a:solidFill>
+                  <a:schemeClr val="tx1"/>
+                </a:solidFill>
+                <a:latin typeface="+mn-lt"/>
+                <a:ea typeface="+mn-ea"/>
+                <a:cs typeface="+mn-cs"/>
+              </a:defRPr>
+            </a:lvl3pPr>
+            <a:lvl4pPr marL="1371600" algn="l" defTabSz="457200" rtl="0" eaLnBrk="1" latinLnBrk="0" hangingPunct="1">
+              <a:defRPr sz="1800" kern="1200">
+                <a:solidFill>
+                  <a:schemeClr val="tx1"/>
+                </a:solidFill>
+                <a:latin typeface="+mn-lt"/>
+                <a:ea typeface="+mn-ea"/>
+                <a:cs typeface="+mn-cs"/>
+              </a:defRPr>
+            </a:lvl4pPr>
+            <a:lvl5pPr marL="1828800" algn="l" defTabSz="457200" rtl="0" eaLnBrk="1" latinLnBrk="0" hangingPunct="1">
+              <a:defRPr sz="1800" kern="1200">
+                <a:solidFill>
+                  <a:schemeClr val="tx1"/>
+                </a:solidFill>
+                <a:latin typeface="+mn-lt"/>
+                <a:ea typeface="+mn-ea"/>
+                <a:cs typeface="+mn-cs"/>
+              </a:defRPr>
+            </a:lvl5pPr>
+            <a:lvl6pPr marL="2286000" algn="l" defTabSz="457200" rtl="0" eaLnBrk="1" latinLnBrk="0" hangingPunct="1">
+              <a:defRPr sz="1800" kern="1200">
+                <a:solidFill>
+                  <a:schemeClr val="tx1"/>
+                </a:solidFill>
+                <a:latin typeface="+mn-lt"/>
+                <a:ea typeface="+mn-ea"/>
+                <a:cs typeface="+mn-cs"/>
+              </a:defRPr>
+            </a:lvl6pPr>
+            <a:lvl7pPr marL="2743200" algn="l" defTabSz="457200" rtl="0" eaLnBrk="1" latinLnBrk="0" hangingPunct="1">
+              <a:defRPr sz="1800" kern="1200">
+                <a:solidFill>
+                  <a:schemeClr val="tx1"/>
+                </a:solidFill>
+                <a:latin typeface="+mn-lt"/>
+                <a:ea typeface="+mn-ea"/>
+                <a:cs typeface="+mn-cs"/>
+              </a:defRPr>
+            </a:lvl7pPr>
+            <a:lvl8pPr marL="3200400" algn="l" defTabSz="457200" rtl="0" eaLnBrk="1" latinLnBrk="0" hangingPunct="1">
+              <a:defRPr sz="1800" kern="1200">
+                <a:solidFill>
+                  <a:schemeClr val="tx1"/>
+                </a:solidFill>
+                <a:latin typeface="+mn-lt"/>
+                <a:ea typeface="+mn-ea"/>
+                <a:cs typeface="+mn-cs"/>
+              </a:defRPr>
+            </a:lvl8pPr>
+            <a:lvl9pPr marL="3657600" algn="l" defTabSz="457200" rtl="0" eaLnBrk="1" latinLnBrk="0" hangingPunct="1">
+              <a:defRPr sz="1800" kern="1200">
+                <a:solidFill>
+                  <a:schemeClr val="tx1"/>
+                </a:solidFill>
+                <a:latin typeface="+mn-lt"/>
+                <a:ea typeface="+mn-ea"/>
+                <a:cs typeface="+mn-cs"/>
+              </a:defRPr>
+            </a:lvl9pPr>
+          </a:lstStyle>
+          <a:p>
+            <a:pPr algn="ctr"/>
+            <a:r>
+              <a:rPr sz="2400" b="1" dirty="0">
+                <a:solidFill>
+                  <a:srgbClr val="FFFFFF"/>
+                </a:solidFill>
+                <a:latin typeface="Aptos"/>
+              </a:rPr>
+              <a:t>↓</a:t>
             </a:r>
           </a:p>
         </p:txBody>
